--- a/companies/calderwood-partners/Engagements/Key Group/2009.08.24 - Briefing Deck - Key Group (copy).pptx
+++ b/companies/calderwood-partners/Engagements/Key Group/2009.08.24 - Briefing Deck - Key Group (copy).pptx
@@ -3153,7 +3153,7 @@
           <a:p>
             <a:pPr lvl="1"/>
             <a:r>
-              <a:t>Prepared by the engagement team at Key Group's request</a:t>
+              <a:t>Prepared by the engagement team</a:t>
             </a:r>
           </a:p>
           <a:p>
@@ -3237,7 +3237,7 @@
           <a:p>
             <a:pPr lvl="1"/>
             <a:r>
-              <a:t>Size the market the company serves and the near segments it does not</a:t>
+              <a:t>Size the markets the company serves and the near ones it does not</a:t>
             </a:r>
           </a:p>
           <a:p>
@@ -3315,7 +3315,7 @@
           <a:p>
             <a:pPr lvl="1"/>
             <a:r>
-              <a:t>Daniel Leach is sizing the market from published sources and your figures, in parallel with the current-state work</a:t>
+              <a:t>Daniel Leach is sizing the market from published sources and your figures, alongside the current-state work</a:t>
             </a:r>
           </a:p>
           <a:p>
@@ -3399,13 +3399,13 @@
           <a:p>
             <a:pPr lvl="1"/>
             <a:r>
-              <a:t>The nearest adjacent segments are larger than the core, but more contested</a:t>
+              <a:t>The nearest adjacent segments are larger than the core, and more contested</a:t>
             </a:r>
           </a:p>
           <a:p>
             <a:pPr lvl="1"/>
             <a:r>
-              <a:t>Geographic extension comes up repeatedly in the interviews, without a clear read yet on what it would cost</a:t>
+              <a:t>Geographic extension comes up repeatedly in the interviews, with no clear read yet on its cost</a:t>
             </a:r>
           </a:p>
           <a:p>
@@ -3477,7 +3477,7 @@
           <a:p>
             <a:pPr lvl="1"/>
             <a:r>
-              <a:t>Current-position picture built to the segment level; customer detail in hand for the largest segment</a:t>
+              <a:t>Current-position picture built to segment level; customer detail in hand for the largest segment</a:t>
             </a:r>
           </a:p>
           <a:p>
@@ -3579,7 +3579,7 @@
           <a:p>
             <a:pPr lvl="1"/>
             <a:r>
-              <a:t>Questions to Brenda Rodriguez; data questions direct to Daniel Leach</a:t>
+              <a:t>Questions to Brenda Rodriguez; data questions to Daniel Leach</a:t>
             </a:r>
           </a:p>
         </p:txBody>
